--- a/Day 3/docker_library/Library Data Cleaning Automation.pptx
+++ b/Day 3/docker_library/Library Data Cleaning Automation.pptx
@@ -14,8 +14,7 @@
     <p:sldId id="264" r:id="rId8"/>
     <p:sldId id="265" r:id="rId9"/>
     <p:sldId id="262" r:id="rId10"/>
-    <p:sldId id="263" r:id="rId11"/>
-    <p:sldId id="266" r:id="rId12"/>
+    <p:sldId id="266" r:id="rId11"/>
   </p:sldIdLst>
   <p:sldSz cx="12192000" cy="6858000"/>
   <p:notesSz cx="6858000" cy="9144000"/>
@@ -114,7 +113,24 @@
       </a:defRPr>
     </a:lvl9pPr>
   </p:defaultTextStyle>
+  <p:extLst>
+    <p:ext uri="{EFAFB233-063F-42B5-8137-9DF3F51BA10A}">
+      <p15:sldGuideLst xmlns:p15="http://schemas.microsoft.com/office/powerpoint/2012/main"/>
+    </p:ext>
+  </p:extLst>
 </p:presentation>
+</file>
+
+<file path=ppt/commentAuthors.xml><?xml version="1.0" encoding="utf-8"?>
+<p:cmAuthorLst xmlns:a="http://schemas.openxmlformats.org/drawingml/2006/main" xmlns:r="http://schemas.openxmlformats.org/officeDocument/2006/relationships" xmlns:p="http://schemas.openxmlformats.org/presentationml/2006/main">
+  <p:cmAuthor id="1" name="Admin" initials="A" lastIdx="1" clrIdx="0">
+    <p:extLst>
+      <p:ext uri="{19B8F6BF-5375-455C-9EA6-DF929625EA0E}">
+        <p15:presenceInfo xmlns:p15="http://schemas.microsoft.com/office/powerpoint/2012/main" userId="Admin" providerId="None"/>
+      </p:ext>
+    </p:extLst>
+  </p:cmAuthor>
+</p:cmAuthorLst>
 </file>
 
 <file path=ppt/slideLayouts/slideLayout1.xml><?xml version="1.0" encoding="utf-8"?>
@@ -3434,7 +3450,7 @@
           <a:p>
             <a:r>
               <a:rPr lang="en-US" dirty="0"/>
-              <a:t>Demonstration</a:t>
+              <a:t>Conclusion</a:t>
             </a:r>
             <a:br>
               <a:rPr lang="en-US" dirty="0"/>
@@ -3464,94 +3480,37 @@
           <a:bodyPr/>
           <a:lstStyle/>
           <a:p>
-            <a:endParaRPr lang="en-GB"/>
-          </a:p>
-        </p:txBody>
-      </p:sp>
-    </p:spTree>
-    <p:extLst>
-      <p:ext uri="{BB962C8B-B14F-4D97-AF65-F5344CB8AC3E}">
-        <p14:creationId xmlns:p14="http://schemas.microsoft.com/office/powerpoint/2010/main" val="2704820663"/>
-      </p:ext>
-    </p:extLst>
-  </p:cSld>
-  <p:clrMapOvr>
-    <a:masterClrMapping/>
-  </p:clrMapOvr>
-</p:sld>
-</file>
-
-<file path=ppt/slides/slide11.xml><?xml version="1.0" encoding="utf-8"?>
-<p:sld xmlns:a="http://schemas.openxmlformats.org/drawingml/2006/main" xmlns:r="http://schemas.openxmlformats.org/officeDocument/2006/relationships" xmlns:p="http://schemas.openxmlformats.org/presentationml/2006/main">
-  <p:cSld>
-    <p:spTree>
-      <p:nvGrpSpPr>
-        <p:cNvPr id="1" name=""/>
-        <p:cNvGrpSpPr/>
-        <p:nvPr/>
-      </p:nvGrpSpPr>
-      <p:grpSpPr>
-        <a:xfrm>
-          <a:off x="0" y="0"/>
-          <a:ext cx="0" cy="0"/>
-          <a:chOff x="0" y="0"/>
-          <a:chExt cx="0" cy="0"/>
-        </a:xfrm>
-      </p:grpSpPr>
-      <p:sp>
-        <p:nvSpPr>
-          <p:cNvPr id="2" name="Title 1">
-            <a:extLst>
-              <a:ext uri="{FF2B5EF4-FFF2-40B4-BE49-F238E27FC236}">
-                <a16:creationId xmlns:a16="http://schemas.microsoft.com/office/drawing/2014/main" id="{29786F16-1B88-4E25-83C2-AA92E99DB8F4}"/>
-              </a:ext>
-            </a:extLst>
-          </p:cNvPr>
-          <p:cNvSpPr>
-            <a:spLocks noGrp="1"/>
-          </p:cNvSpPr>
-          <p:nvPr>
-            <p:ph type="title"/>
-          </p:nvPr>
-        </p:nvSpPr>
-        <p:spPr/>
-        <p:txBody>
-          <a:bodyPr/>
-          <a:lstStyle/>
-          <a:p>
             <a:r>
               <a:rPr lang="en-US" dirty="0"/>
-              <a:t>Conclusion</a:t>
-            </a:r>
-            <a:br>
+              <a:t>Successfully automated the library data cleaning using Python</a:t>
+            </a:r>
+          </a:p>
+          <a:p>
+            <a:r>
               <a:rPr lang="en-US" dirty="0"/>
-            </a:br>
+              <a:t>Generated operational pipeline metrics</a:t>
+            </a:r>
+          </a:p>
+          <a:p>
+            <a:r>
+              <a:rPr lang="en-US" dirty="0"/>
+              <a:t>Monitoring Power BI Dashboard</a:t>
+            </a:r>
+          </a:p>
+          <a:p>
+            <a:r>
+              <a:rPr lang="en-US" dirty="0"/>
+              <a:t>Reduced manual processing</a:t>
+            </a:r>
+          </a:p>
+          <a:p>
+            <a:r>
+              <a:rPr lang="en-US" dirty="0"/>
+              <a:t>Identified future opportunities including automation and validation improvements</a:t>
+            </a:r>
+          </a:p>
+          <a:p>
             <a:endParaRPr lang="en-GB" dirty="0"/>
-          </a:p>
-        </p:txBody>
-      </p:sp>
-      <p:sp>
-        <p:nvSpPr>
-          <p:cNvPr id="3" name="Content Placeholder 2">
-            <a:extLst>
-              <a:ext uri="{FF2B5EF4-FFF2-40B4-BE49-F238E27FC236}">
-                <a16:creationId xmlns:a16="http://schemas.microsoft.com/office/drawing/2014/main" id="{CA98A5B3-FBBB-4C01-BB9B-9572D207E81B}"/>
-              </a:ext>
-            </a:extLst>
-          </p:cNvPr>
-          <p:cNvSpPr>
-            <a:spLocks noGrp="1"/>
-          </p:cNvSpPr>
-          <p:nvPr>
-            <p:ph idx="1"/>
-          </p:nvPr>
-        </p:nvSpPr>
-        <p:spPr/>
-        <p:txBody>
-          <a:bodyPr/>
-          <a:lstStyle/>
-          <a:p>
-            <a:endParaRPr lang="en-GB"/>
           </a:p>
         </p:txBody>
       </p:sp>
@@ -4518,17 +4477,41 @@
           <a:p>
             <a:r>
               <a:rPr lang="en-US" dirty="0"/>
-              <a:t>Remove incomplete </a:t>
-            </a:r>
-            <a:r>
-              <a:rPr lang="en-US" dirty="0" err="1"/>
-              <a:t>recorrds</a:t>
-            </a:r>
-            <a:r>
-              <a:rPr lang="en-US" dirty="0"/>
-              <a:t>/</a:t>
-            </a:r>
-            <a:endParaRPr lang="en-GB" dirty="0"/>
+              <a:t>Remove incomplete records</a:t>
+            </a:r>
+          </a:p>
+          <a:p>
+            <a:r>
+              <a:rPr lang="en-GB" dirty="0"/>
+              <a:t>Remove invalid customer references</a:t>
+            </a:r>
+          </a:p>
+          <a:p>
+            <a:r>
+              <a:rPr lang="en-GB" dirty="0"/>
+              <a:t>Calculate metrics:</a:t>
+            </a:r>
+          </a:p>
+          <a:p>
+            <a:pPr lvl="1"/>
+            <a:r>
+              <a:rPr lang="en-GB" dirty="0"/>
+              <a:t>Days borrowed</a:t>
+            </a:r>
+          </a:p>
+          <a:p>
+            <a:pPr lvl="1"/>
+            <a:r>
+              <a:rPr lang="en-GB" dirty="0"/>
+              <a:t>Overdue books</a:t>
+            </a:r>
+          </a:p>
+          <a:p>
+            <a:pPr lvl="1"/>
+            <a:r>
+              <a:rPr lang="en-GB" dirty="0"/>
+              <a:t>Data errors</a:t>
+            </a:r>
           </a:p>
         </p:txBody>
       </p:sp>
@@ -4594,31 +4577,36 @@
           </a:p>
         </p:txBody>
       </p:sp>
-      <p:sp>
-        <p:nvSpPr>
-          <p:cNvPr id="3" name="Content Placeholder 2">
-            <a:extLst>
-              <a:ext uri="{FF2B5EF4-FFF2-40B4-BE49-F238E27FC236}">
-                <a16:creationId xmlns:a16="http://schemas.microsoft.com/office/drawing/2014/main" id="{CA98A5B3-FBBB-4C01-BB9B-9572D207E81B}"/>
-              </a:ext>
-            </a:extLst>
-          </p:cNvPr>
-          <p:cNvSpPr>
-            <a:spLocks noGrp="1"/>
-          </p:cNvSpPr>
-          <p:nvPr>
-            <p:ph idx="1"/>
-          </p:nvPr>
-        </p:nvSpPr>
-        <p:spPr/>
-        <p:txBody>
-          <a:bodyPr/>
-          <a:lstStyle/>
-          <a:p>
-            <a:endParaRPr lang="en-GB"/>
-          </a:p>
-        </p:txBody>
-      </p:sp>
+      <p:pic>
+        <p:nvPicPr>
+          <p:cNvPr id="10" name="Picture 9">
+            <a:extLst>
+              <a:ext uri="{FF2B5EF4-FFF2-40B4-BE49-F238E27FC236}">
+                <a16:creationId xmlns:a16="http://schemas.microsoft.com/office/drawing/2014/main" id="{F62CA032-61B4-4FF9-8233-F6388D10E328}"/>
+              </a:ext>
+            </a:extLst>
+          </p:cNvPr>
+          <p:cNvPicPr>
+            <a:picLocks noChangeAspect="1"/>
+          </p:cNvPicPr>
+          <p:nvPr/>
+        </p:nvPicPr>
+        <p:blipFill>
+          <a:blip r:embed="rId2"/>
+          <a:stretch>
+            <a:fillRect/>
+          </a:stretch>
+        </p:blipFill>
+        <p:spPr>
+          <a:xfrm>
+            <a:off x="773074" y="1114759"/>
+            <a:ext cx="8207451" cy="5220152"/>
+          </a:xfrm>
+          <a:prstGeom prst="rect">
+            <a:avLst/>
+          </a:prstGeom>
+        </p:spPr>
+      </p:pic>
     </p:spTree>
     <p:extLst>
       <p:ext uri="{BB962C8B-B14F-4D97-AF65-F5344CB8AC3E}">
@@ -4697,12 +4685,44 @@
             <p:ph idx="1"/>
           </p:nvPr>
         </p:nvSpPr>
-        <p:spPr/>
-        <p:txBody>
-          <a:bodyPr/>
-          <a:lstStyle/>
-          <a:p>
-            <a:endParaRPr lang="en-GB"/>
+        <p:spPr>
+          <a:xfrm>
+            <a:off x="502024" y="1825625"/>
+            <a:ext cx="10851776" cy="4351338"/>
+          </a:xfrm>
+        </p:spPr>
+        <p:txBody>
+          <a:bodyPr/>
+          <a:lstStyle/>
+          <a:p>
+            <a:r>
+              <a:rPr lang="en-US" dirty="0"/>
+              <a:t>Poor quality source data (blank rows, invalid values, duplicate records)</a:t>
+            </a:r>
+          </a:p>
+          <a:p>
+            <a:r>
+              <a:rPr lang="en-US" dirty="0"/>
+              <a:t> Changes to source file (column names, formatting changes)</a:t>
+            </a:r>
+          </a:p>
+          <a:p>
+            <a:r>
+              <a:rPr lang="en-GB" dirty="0"/>
+              <a:t>Incorrect or outdated file uploads</a:t>
+            </a:r>
+          </a:p>
+          <a:p>
+            <a:r>
+              <a:rPr lang="en-GB" dirty="0"/>
+              <a:t>Pipeline or Docker container failure</a:t>
+            </a:r>
+          </a:p>
+          <a:p>
+            <a:r>
+              <a:rPr lang="en-GB" dirty="0"/>
+              <a:t>Legitimate records accidentally removed during cleaning</a:t>
+            </a:r>
           </a:p>
         </p:txBody>
       </p:sp>
@@ -4768,28 +4788,402 @@
           </a:p>
         </p:txBody>
       </p:sp>
-      <p:sp>
-        <p:nvSpPr>
-          <p:cNvPr id="3" name="Content Placeholder 2">
-            <a:extLst>
-              <a:ext uri="{FF2B5EF4-FFF2-40B4-BE49-F238E27FC236}">
-                <a16:creationId xmlns:a16="http://schemas.microsoft.com/office/drawing/2014/main" id="{CA98A5B3-FBBB-4C01-BB9B-9572D207E81B}"/>
-              </a:ext>
-            </a:extLst>
-          </p:cNvPr>
-          <p:cNvSpPr>
-            <a:spLocks noGrp="1"/>
-          </p:cNvSpPr>
-          <p:nvPr>
-            <p:ph idx="1"/>
-          </p:nvPr>
-        </p:nvSpPr>
-        <p:spPr/>
-        <p:txBody>
-          <a:bodyPr/>
-          <a:lstStyle/>
-          <a:p>
-            <a:endParaRPr lang="en-GB"/>
+      <p:cxnSp>
+        <p:nvCxnSpPr>
+          <p:cNvPr id="5" name="Straight Connector 4">
+            <a:extLst>
+              <a:ext uri="{FF2B5EF4-FFF2-40B4-BE49-F238E27FC236}">
+                <a16:creationId xmlns:a16="http://schemas.microsoft.com/office/drawing/2014/main" id="{E869EE2C-953A-4334-BDE6-A7575F0E5075}"/>
+              </a:ext>
+            </a:extLst>
+          </p:cNvPr>
+          <p:cNvCxnSpPr/>
+          <p:nvPr/>
+        </p:nvCxnSpPr>
+        <p:spPr>
+          <a:xfrm>
+            <a:off x="6006353" y="1246094"/>
+            <a:ext cx="0" cy="5235388"/>
+          </a:xfrm>
+          <a:prstGeom prst="line">
+            <a:avLst/>
+          </a:prstGeom>
+        </p:spPr>
+        <p:style>
+          <a:lnRef idx="1">
+            <a:schemeClr val="accent1"/>
+          </a:lnRef>
+          <a:fillRef idx="0">
+            <a:schemeClr val="accent1"/>
+          </a:fillRef>
+          <a:effectRef idx="0">
+            <a:schemeClr val="accent1"/>
+          </a:effectRef>
+          <a:fontRef idx="minor">
+            <a:schemeClr val="tx1"/>
+          </a:fontRef>
+        </p:style>
+      </p:cxnSp>
+      <p:cxnSp>
+        <p:nvCxnSpPr>
+          <p:cNvPr id="7" name="Straight Connector 6">
+            <a:extLst>
+              <a:ext uri="{FF2B5EF4-FFF2-40B4-BE49-F238E27FC236}">
+                <a16:creationId xmlns:a16="http://schemas.microsoft.com/office/drawing/2014/main" id="{9DC667D8-8DE4-4069-91AB-7FCA116F29B0}"/>
+              </a:ext>
+            </a:extLst>
+          </p:cNvPr>
+          <p:cNvCxnSpPr/>
+          <p:nvPr/>
+        </p:nvCxnSpPr>
+        <p:spPr>
+          <a:xfrm>
+            <a:off x="385482" y="3630706"/>
+            <a:ext cx="11259671" cy="107576"/>
+          </a:xfrm>
+          <a:prstGeom prst="line">
+            <a:avLst/>
+          </a:prstGeom>
+        </p:spPr>
+        <p:style>
+          <a:lnRef idx="1">
+            <a:schemeClr val="accent1"/>
+          </a:lnRef>
+          <a:fillRef idx="0">
+            <a:schemeClr val="accent1"/>
+          </a:fillRef>
+          <a:effectRef idx="0">
+            <a:schemeClr val="accent1"/>
+          </a:effectRef>
+          <a:fontRef idx="minor">
+            <a:schemeClr val="tx1"/>
+          </a:fontRef>
+        </p:style>
+      </p:cxnSp>
+      <p:sp>
+        <p:nvSpPr>
+          <p:cNvPr id="8" name="TextBox 7">
+            <a:extLst>
+              <a:ext uri="{FF2B5EF4-FFF2-40B4-BE49-F238E27FC236}">
+                <a16:creationId xmlns:a16="http://schemas.microsoft.com/office/drawing/2014/main" id="{5E6D4963-AF93-4560-AADF-4322570AED92}"/>
+              </a:ext>
+            </a:extLst>
+          </p:cNvPr>
+          <p:cNvSpPr txBox="1"/>
+          <p:nvPr/>
+        </p:nvSpPr>
+        <p:spPr>
+          <a:xfrm>
+            <a:off x="484093" y="1479141"/>
+            <a:ext cx="5289172" cy="2031325"/>
+          </a:xfrm>
+          <a:prstGeom prst="rect">
+            <a:avLst/>
+          </a:prstGeom>
+          <a:noFill/>
+        </p:spPr>
+        <p:txBody>
+          <a:bodyPr wrap="square" rtlCol="0">
+            <a:spAutoFit/>
+          </a:bodyPr>
+          <a:lstStyle/>
+          <a:p>
+            <a:r>
+              <a:rPr lang="en-US" b="1" dirty="0"/>
+              <a:t>Strengths</a:t>
+            </a:r>
+          </a:p>
+          <a:p>
+            <a:endParaRPr lang="en-GB" b="1" dirty="0"/>
+          </a:p>
+          <a:p>
+            <a:pPr marL="285750" indent="-285750">
+              <a:buFont typeface="Arial" panose="020B0604020202020204" pitchFamily="34" charset="0"/>
+              <a:buChar char="•"/>
+            </a:pPr>
+            <a:r>
+              <a:rPr lang="en-GB" dirty="0"/>
+              <a:t>Automated data cleaning process</a:t>
+            </a:r>
+          </a:p>
+          <a:p>
+            <a:pPr marL="285750" indent="-285750">
+              <a:buFont typeface="Arial" panose="020B0604020202020204" pitchFamily="34" charset="0"/>
+              <a:buChar char="•"/>
+            </a:pPr>
+            <a:r>
+              <a:rPr lang="en-GB" dirty="0"/>
+              <a:t>Repeatable and consistent pipeline</a:t>
+            </a:r>
+          </a:p>
+          <a:p>
+            <a:pPr marL="285750" indent="-285750">
+              <a:buFont typeface="Arial" panose="020B0604020202020204" pitchFamily="34" charset="0"/>
+              <a:buChar char="•"/>
+            </a:pPr>
+            <a:r>
+              <a:rPr lang="en-GB" dirty="0"/>
+              <a:t>Reduced manual processing</a:t>
+            </a:r>
+          </a:p>
+          <a:p>
+            <a:pPr marL="285750" indent="-285750">
+              <a:buFont typeface="Arial" panose="020B0604020202020204" pitchFamily="34" charset="0"/>
+              <a:buChar char="•"/>
+            </a:pPr>
+            <a:r>
+              <a:rPr lang="en-GB" dirty="0"/>
+              <a:t>Power BI monitoring Dashboard</a:t>
+            </a:r>
+          </a:p>
+          <a:p>
+            <a:pPr marL="285750" indent="-285750">
+              <a:buFont typeface="Arial" panose="020B0604020202020204" pitchFamily="34" charset="0"/>
+              <a:buChar char="•"/>
+            </a:pPr>
+            <a:endParaRPr lang="en-GB" dirty="0"/>
+          </a:p>
+        </p:txBody>
+      </p:sp>
+      <p:sp>
+        <p:nvSpPr>
+          <p:cNvPr id="10" name="TextBox 9">
+            <a:extLst>
+              <a:ext uri="{FF2B5EF4-FFF2-40B4-BE49-F238E27FC236}">
+                <a16:creationId xmlns:a16="http://schemas.microsoft.com/office/drawing/2014/main" id="{18ADB645-628D-4443-9BCE-C1D3D67E0717}"/>
+              </a:ext>
+            </a:extLst>
+          </p:cNvPr>
+          <p:cNvSpPr txBox="1"/>
+          <p:nvPr/>
+        </p:nvSpPr>
+        <p:spPr>
+          <a:xfrm>
+            <a:off x="6418735" y="1479141"/>
+            <a:ext cx="5289172" cy="2031325"/>
+          </a:xfrm>
+          <a:prstGeom prst="rect">
+            <a:avLst/>
+          </a:prstGeom>
+          <a:noFill/>
+        </p:spPr>
+        <p:txBody>
+          <a:bodyPr wrap="square" rtlCol="0">
+            <a:spAutoFit/>
+          </a:bodyPr>
+          <a:lstStyle/>
+          <a:p>
+            <a:r>
+              <a:rPr lang="en-US" b="1" dirty="0"/>
+              <a:t>Weaknesses</a:t>
+            </a:r>
+          </a:p>
+          <a:p>
+            <a:endParaRPr lang="en-GB" b="1" dirty="0"/>
+          </a:p>
+          <a:p>
+            <a:pPr marL="285750" indent="-285750">
+              <a:buFont typeface="Arial" panose="020B0604020202020204" pitchFamily="34" charset="0"/>
+              <a:buChar char="•"/>
+            </a:pPr>
+            <a:r>
+              <a:rPr lang="en-GB" dirty="0"/>
+              <a:t>Reliance on source data quality</a:t>
+            </a:r>
+          </a:p>
+          <a:p>
+            <a:pPr marL="285750" indent="-285750">
+              <a:buFont typeface="Arial" panose="020B0604020202020204" pitchFamily="34" charset="0"/>
+              <a:buChar char="•"/>
+            </a:pPr>
+            <a:r>
+              <a:rPr lang="en-GB" dirty="0"/>
+              <a:t>Manual file upload/trigger</a:t>
+            </a:r>
+          </a:p>
+          <a:p>
+            <a:pPr marL="285750" indent="-285750">
+              <a:buFont typeface="Arial" panose="020B0604020202020204" pitchFamily="34" charset="0"/>
+              <a:buChar char="•"/>
+            </a:pPr>
+            <a:r>
+              <a:rPr lang="en-GB" dirty="0"/>
+              <a:t>Some business duplicates maybe not be detected</a:t>
+            </a:r>
+          </a:p>
+          <a:p>
+            <a:pPr marL="285750" indent="-285750">
+              <a:buFont typeface="Arial" panose="020B0604020202020204" pitchFamily="34" charset="0"/>
+              <a:buChar char="•"/>
+            </a:pPr>
+            <a:endParaRPr lang="en-GB" dirty="0"/>
+          </a:p>
+          <a:p>
+            <a:pPr marL="285750" indent="-285750">
+              <a:buFont typeface="Arial" panose="020B0604020202020204" pitchFamily="34" charset="0"/>
+              <a:buChar char="•"/>
+            </a:pPr>
+            <a:endParaRPr lang="en-GB" dirty="0"/>
+          </a:p>
+        </p:txBody>
+      </p:sp>
+      <p:sp>
+        <p:nvSpPr>
+          <p:cNvPr id="11" name="TextBox 10">
+            <a:extLst>
+              <a:ext uri="{FF2B5EF4-FFF2-40B4-BE49-F238E27FC236}">
+                <a16:creationId xmlns:a16="http://schemas.microsoft.com/office/drawing/2014/main" id="{DB9E9D41-AA1D-489D-B64F-0DF2C5DF1292}"/>
+              </a:ext>
+            </a:extLst>
+          </p:cNvPr>
+          <p:cNvSpPr txBox="1"/>
+          <p:nvPr/>
+        </p:nvSpPr>
+        <p:spPr>
+          <a:xfrm>
+            <a:off x="403412" y="4079450"/>
+            <a:ext cx="5289172" cy="2031325"/>
+          </a:xfrm>
+          <a:prstGeom prst="rect">
+            <a:avLst/>
+          </a:prstGeom>
+          <a:noFill/>
+        </p:spPr>
+        <p:txBody>
+          <a:bodyPr wrap="square" rtlCol="0">
+            <a:spAutoFit/>
+          </a:bodyPr>
+          <a:lstStyle/>
+          <a:p>
+            <a:r>
+              <a:rPr lang="en-US" b="1" dirty="0"/>
+              <a:t>Opportunities</a:t>
+            </a:r>
+          </a:p>
+          <a:p>
+            <a:endParaRPr lang="en-GB" b="1" dirty="0"/>
+          </a:p>
+          <a:p>
+            <a:pPr marL="285750" indent="-285750">
+              <a:buFont typeface="Arial" panose="020B0604020202020204" pitchFamily="34" charset="0"/>
+              <a:buChar char="•"/>
+            </a:pPr>
+            <a:r>
+              <a:rPr lang="en-GB" dirty="0"/>
+              <a:t>CI/CD pipeline Integration</a:t>
+            </a:r>
+          </a:p>
+          <a:p>
+            <a:pPr marL="285750" indent="-285750">
+              <a:buFont typeface="Arial" panose="020B0604020202020204" pitchFamily="34" charset="0"/>
+              <a:buChar char="•"/>
+            </a:pPr>
+            <a:r>
+              <a:rPr lang="en-GB" dirty="0"/>
+              <a:t>Scheduled Automation</a:t>
+            </a:r>
+          </a:p>
+          <a:p>
+            <a:pPr marL="285750" indent="-285750">
+              <a:buFont typeface="Arial" panose="020B0604020202020204" pitchFamily="34" charset="0"/>
+              <a:buChar char="•"/>
+            </a:pPr>
+            <a:r>
+              <a:rPr lang="en-GB" dirty="0"/>
+              <a:t>Database integration</a:t>
+            </a:r>
+          </a:p>
+          <a:p>
+            <a:pPr marL="285750" indent="-285750">
+              <a:buFont typeface="Arial" panose="020B0604020202020204" pitchFamily="34" charset="0"/>
+              <a:buChar char="•"/>
+            </a:pPr>
+            <a:r>
+              <a:rPr lang="en-GB" dirty="0"/>
+              <a:t>Additional validation and business rules</a:t>
+            </a:r>
+          </a:p>
+          <a:p>
+            <a:pPr marL="285750" indent="-285750">
+              <a:buFont typeface="Arial" panose="020B0604020202020204" pitchFamily="34" charset="0"/>
+              <a:buChar char="•"/>
+            </a:pPr>
+            <a:endParaRPr lang="en-GB" dirty="0"/>
+          </a:p>
+        </p:txBody>
+      </p:sp>
+      <p:sp>
+        <p:nvSpPr>
+          <p:cNvPr id="12" name="TextBox 11">
+            <a:extLst>
+              <a:ext uri="{FF2B5EF4-FFF2-40B4-BE49-F238E27FC236}">
+                <a16:creationId xmlns:a16="http://schemas.microsoft.com/office/drawing/2014/main" id="{A2CC5255-5C5A-4EC5-93CF-3335996FA163}"/>
+              </a:ext>
+            </a:extLst>
+          </p:cNvPr>
+          <p:cNvSpPr txBox="1"/>
+          <p:nvPr/>
+        </p:nvSpPr>
+        <p:spPr>
+          <a:xfrm>
+            <a:off x="6418735" y="4135521"/>
+            <a:ext cx="5289172" cy="1754326"/>
+          </a:xfrm>
+          <a:prstGeom prst="rect">
+            <a:avLst/>
+          </a:prstGeom>
+          <a:noFill/>
+        </p:spPr>
+        <p:txBody>
+          <a:bodyPr wrap="square" rtlCol="0">
+            <a:spAutoFit/>
+          </a:bodyPr>
+          <a:lstStyle/>
+          <a:p>
+            <a:r>
+              <a:rPr lang="en-US" b="1" dirty="0"/>
+              <a:t>Threats</a:t>
+            </a:r>
+          </a:p>
+          <a:p>
+            <a:endParaRPr lang="en-GB" b="1" dirty="0"/>
+          </a:p>
+          <a:p>
+            <a:pPr marL="285750" indent="-285750">
+              <a:buFont typeface="Arial" panose="020B0604020202020204" pitchFamily="34" charset="0"/>
+              <a:buChar char="•"/>
+            </a:pPr>
+            <a:r>
+              <a:rPr lang="en-GB" dirty="0"/>
+              <a:t>Incorrect input files uploaded</a:t>
+            </a:r>
+          </a:p>
+          <a:p>
+            <a:pPr marL="285750" indent="-285750">
+              <a:buFont typeface="Arial" panose="020B0604020202020204" pitchFamily="34" charset="0"/>
+              <a:buChar char="•"/>
+            </a:pPr>
+            <a:r>
+              <a:rPr lang="en-GB" dirty="0"/>
+              <a:t>User error during manual process</a:t>
+            </a:r>
+          </a:p>
+          <a:p>
+            <a:pPr marL="285750" indent="-285750">
+              <a:buFont typeface="Arial" panose="020B0604020202020204" pitchFamily="34" charset="0"/>
+              <a:buChar char="•"/>
+            </a:pPr>
+            <a:r>
+              <a:rPr lang="en-GB" dirty="0"/>
+              <a:t>Changes to source file structure</a:t>
+            </a:r>
+          </a:p>
+          <a:p>
+            <a:pPr marL="285750" indent="-285750">
+              <a:buFont typeface="Arial" panose="020B0604020202020204" pitchFamily="34" charset="0"/>
+              <a:buChar char="•"/>
+            </a:pPr>
+            <a:endParaRPr lang="en-GB" dirty="0"/>
           </a:p>
         </p:txBody>
       </p:sp>
